--- a/public/modelos/03_Futebol_Completo.pptx
+++ b/public/modelos/03_Futebol_Completo.pptx
@@ -7,7 +7,7 @@
   <p:sldIdLst>
     <p:sldId id="256" r:id="rId7"/>
   </p:sldIdLst>
-  <p:sldSz cx="8229600" cy="14630400" type="screen4x3"/>
+  <p:sldSz cx="9144000" cy="16256020" type="screen4x3"/>
   <p:notesSz cx="6858000" cy="9144000"/>
   <p:defaultTextStyle>
     <a:defPPr>
@@ -3084,7 +3084,7 @@
     <p:bg>
       <p:bgPr>
         <a:solidFill>
-          <a:srgbClr val="0C0C0C"/>
+          <a:srgbClr val="17242B"/>
         </a:solidFill>
         <a:effectLst/>
       </p:bgPr>
@@ -3104,8 +3104,8 @@
         </p:nvSpPr>
         <p:spPr>
           <a:xfrm>
-            <a:off x="502920" y="320040"/>
-            <a:ext cx="7223760" cy="320040"/>
+            <a:off x="502920" y="256032"/>
+            <a:ext cx="8138160" cy="256032"/>
           </a:xfrm>
           <a:prstGeom prst="rect">
             <a:avLst/>
@@ -3120,13 +3120,13 @@
           <a:p>
             <a:pPr algn="l"/>
             <a:r>
-              <a:rPr sz="1100" b="1">
-                <a:solidFill>
-                  <a:srgbClr val="D2D2D2"/>
-                </a:solidFill>
-                <a:latin typeface="Aptos"/>
+              <a:rPr sz="1000" b="1">
+                <a:solidFill>
+                  <a:srgbClr val="F5F7F8"/>
+                </a:solidFill>
+                <a:latin typeface="Arial"/>
               </a:rPr>
-              <a:t>NÚCLEO DE ÁRBITROS MARQUES BOM</a:t>
+              <a:t>NÚCLEO DE ÁRBITROS DE FUTEBOL MARQUES BOM • COIMBRA</a:t>
             </a:r>
           </a:p>
         </p:txBody>
@@ -3139,8 +3139,8 @@
         </p:nvSpPr>
         <p:spPr>
           <a:xfrm>
-            <a:off x="502920" y="13670280"/>
-            <a:ext cx="7223760" cy="320040"/>
+            <a:off x="502920" y="621792"/>
+            <a:ext cx="1508760" cy="1143000"/>
           </a:xfrm>
           <a:prstGeom prst="rect">
             <a:avLst/>
@@ -3153,15 +3153,15 @@
           </a:bodyPr>
           <a:lstStyle/>
           <a:p>
-            <a:pPr algn="l"/>
-            <a:r>
-              <a:rPr sz="1200" b="0">
-                <a:solidFill>
-                  <a:srgbClr val="AAAAAA"/>
-                </a:solidFill>
-                <a:latin typeface="Aptos"/>
+            <a:pPr algn="ctr"/>
+            <a:r>
+              <a:rPr sz="1600" b="1">
+                <a:solidFill>
+                  <a:srgbClr val="E7B63D"/>
+                </a:solidFill>
+                <a:latin typeface="Arial"/>
               </a:rPr>
-              <a:t>Trabalho, competência e dedicação</a:t>
+              <a:t>LOGO_NUCLEO</a:t>
             </a:r>
           </a:p>
         </p:txBody>
@@ -3174,8 +3174,8 @@
         </p:nvSpPr>
         <p:spPr>
           <a:xfrm>
-            <a:off x="6583680" y="320040"/>
-            <a:ext cx="1143000" cy="274320"/>
+            <a:off x="2057400" y="658368"/>
+            <a:ext cx="6492240" cy="713232"/>
           </a:xfrm>
           <a:prstGeom prst="rect">
             <a:avLst/>
@@ -3188,15 +3188,15 @@
           </a:bodyPr>
           <a:lstStyle/>
           <a:p>
-            <a:pPr algn="r"/>
-            <a:r>
-              <a:rPr sz="800" b="0">
-                <a:solidFill>
-                  <a:srgbClr val="646464"/>
-                </a:solidFill>
-                <a:latin typeface="Aptos"/>
+            <a:pPr algn="l"/>
+            <a:r>
+              <a:rPr sz="4200" b="1">
+                <a:solidFill>
+                  <a:srgbClr val="F5F7F8"/>
+                </a:solidFill>
+                <a:latin typeface="Arial"/>
               </a:rPr>
-              <a:t>03_Futebol_Completo</a:t>
+              <a:t>NOMEAÇÃO</a:t>
             </a:r>
           </a:p>
         </p:txBody>
@@ -3209,8 +3209,8 @@
         </p:nvSpPr>
         <p:spPr>
           <a:xfrm>
-            <a:off x="502920" y="868680"/>
-            <a:ext cx="7223760" cy="502920"/>
+            <a:off x="2057400" y="1508760"/>
+            <a:ext cx="4297680" cy="320040"/>
           </a:xfrm>
           <a:prstGeom prst="rect">
             <a:avLst/>
@@ -3225,13 +3225,13 @@
           <a:p>
             <a:pPr algn="l"/>
             <a:r>
-              <a:rPr sz="3000" b="1">
-                <a:solidFill>
-                  <a:srgbClr val="F5F5F5"/>
-                </a:solidFill>
-                <a:latin typeface="Aptos"/>
+              <a:rPr sz="1800" b="1">
+                <a:solidFill>
+                  <a:srgbClr val="F5F7F8"/>
+                </a:solidFill>
+                <a:latin typeface="Arial"/>
               </a:rPr>
-              <a:t>NOMEAÇÃO</a:t>
+              <a:t>DATA</a:t>
             </a:r>
           </a:p>
         </p:txBody>
@@ -3244,8 +3244,8 @@
         </p:nvSpPr>
         <p:spPr>
           <a:xfrm>
-            <a:off x="502920" y="1417320"/>
-            <a:ext cx="7223760" cy="502920"/>
+            <a:off x="6629400" y="1508760"/>
+            <a:ext cx="1645920" cy="320040"/>
           </a:xfrm>
           <a:prstGeom prst="rect">
             <a:avLst/>
@@ -3258,15 +3258,15 @@
           </a:bodyPr>
           <a:lstStyle/>
           <a:p>
-            <a:pPr algn="l"/>
-            <a:r>
-              <a:rPr sz="2200" b="1">
-                <a:solidFill>
-                  <a:srgbClr val="F5F5F5"/>
-                </a:solidFill>
-                <a:latin typeface="Aptos"/>
+            <a:pPr algn="r"/>
+            <a:r>
+              <a:rPr sz="1800" b="1">
+                <a:solidFill>
+                  <a:srgbClr val="E7B63D"/>
+                </a:solidFill>
+                <a:latin typeface="Arial"/>
               </a:rPr>
-              <a:t>{{COMPETICAO}}</a:t>
+              <a:t>HORA</a:t>
             </a:r>
           </a:p>
         </p:txBody>
@@ -3279,8 +3279,8 @@
         </p:nvSpPr>
         <p:spPr>
           <a:xfrm>
-            <a:off x="502920" y="1901952"/>
-            <a:ext cx="7223760" cy="320040"/>
+            <a:off x="502920" y="2240280"/>
+            <a:ext cx="8138160" cy="438912"/>
           </a:xfrm>
           <a:prstGeom prst="rect">
             <a:avLst/>
@@ -3295,37 +3295,72 @@
           <a:p>
             <a:pPr algn="l"/>
             <a:r>
-              <a:rPr sz="1400" b="0">
-                <a:solidFill>
-                  <a:srgbClr val="B4B4B4"/>
-                </a:solidFill>
-                <a:latin typeface="Aptos"/>
+              <a:rPr sz="2500" b="1">
+                <a:solidFill>
+                  <a:srgbClr val="E7B63D"/>
+                </a:solidFill>
+                <a:latin typeface="Arial"/>
               </a:rPr>
-              <a:t>{{DATA}}  •  {{HORA}}</a:t>
-            </a:r>
-          </a:p>
-        </p:txBody>
-      </p:sp>
-      <p:sp>
-        <p:nvSpPr>
-          <p:cNvPr id="8" name="Rounded Rectangle 7"/>
+              <a:t>COMPETICAO</a:t>
+            </a:r>
+          </a:p>
+        </p:txBody>
+      </p:sp>
+      <p:sp>
+        <p:nvSpPr>
+          <p:cNvPr id="8" name="TextBox 7"/>
+          <p:cNvSpPr txBox="1"/>
+          <p:nvPr/>
+        </p:nvSpPr>
+        <p:spPr>
+          <a:xfrm>
+            <a:off x="502920" y="2724912"/>
+            <a:ext cx="8138160" cy="347472"/>
+          </a:xfrm>
+          <a:prstGeom prst="rect">
+            <a:avLst/>
+          </a:prstGeom>
+          <a:noFill/>
+        </p:spPr>
+        <p:txBody>
+          <a:bodyPr wrap="none" anchor="ctr">
+            <a:spAutoFit/>
+          </a:bodyPr>
+          <a:lstStyle/>
+          <a:p>
+            <a:pPr algn="l"/>
+            <a:r>
+              <a:rPr sz="1400" b="1">
+                <a:solidFill>
+                  <a:srgbClr val="F5F7F8"/>
+                </a:solidFill>
+                <a:latin typeface="Arial"/>
+              </a:rPr>
+              <a:t>FASE_JORNADA</a:t>
+            </a:r>
+          </a:p>
+        </p:txBody>
+      </p:sp>
+      <p:sp>
+        <p:nvSpPr>
+          <p:cNvPr id="9" name="Rounded Rectangle 8"/>
           <p:cNvSpPr/>
           <p:nvPr/>
         </p:nvSpPr>
         <p:spPr>
           <a:xfrm>
-            <a:off x="502920" y="2423160"/>
-            <a:ext cx="7223760" cy="1234440"/>
+            <a:off x="347472" y="3246120"/>
+            <a:ext cx="8449056" cy="2331720"/>
           </a:xfrm>
           <a:prstGeom prst="roundRect">
             <a:avLst/>
           </a:prstGeom>
           <a:solidFill>
-            <a:srgbClr val="161616"/>
+            <a:srgbClr val="141F25"/>
           </a:solidFill>
           <a:ln>
             <a:solidFill>
-              <a:srgbClr val="373737"/>
+              <a:srgbClr val="465258"/>
             </a:solidFill>
           </a:ln>
         </p:spPr>
@@ -3353,14 +3388,14 @@
       </p:sp>
       <p:sp>
         <p:nvSpPr>
-          <p:cNvPr id="9" name="TextBox 8"/>
+          <p:cNvPr id="10" name="TextBox 9"/>
           <p:cNvSpPr txBox="1"/>
           <p:nvPr/>
         </p:nvSpPr>
         <p:spPr>
           <a:xfrm>
-            <a:off x="685800" y="2596896"/>
-            <a:ext cx="3063240" cy="685800"/>
+            <a:off x="594360" y="3767328"/>
+            <a:ext cx="1325880" cy="1234440"/>
           </a:xfrm>
           <a:prstGeom prst="rect">
             <a:avLst/>
@@ -3375,27 +3410,27 @@
           <a:p>
             <a:pPr algn="ctr"/>
             <a:r>
-              <a:rPr sz="2000" b="1">
-                <a:solidFill>
-                  <a:srgbClr val="F5F5F5"/>
-                </a:solidFill>
-                <a:latin typeface="Aptos"/>
+              <a:rPr sz="1400" b="1">
+                <a:solidFill>
+                  <a:srgbClr val="E7B63D"/>
+                </a:solidFill>
+                <a:latin typeface="Arial"/>
               </a:rPr>
-              <a:t>{{EQUIPA_CASA}}</a:t>
-            </a:r>
-          </a:p>
-        </p:txBody>
-      </p:sp>
-      <p:sp>
-        <p:nvSpPr>
-          <p:cNvPr id="10" name="TextBox 9"/>
+              <a:t>ESCUDO_CASA</a:t>
+            </a:r>
+          </a:p>
+        </p:txBody>
+      </p:sp>
+      <p:sp>
+        <p:nvSpPr>
+          <p:cNvPr id="11" name="TextBox 10"/>
           <p:cNvSpPr txBox="1"/>
           <p:nvPr/>
         </p:nvSpPr>
         <p:spPr>
           <a:xfrm>
-            <a:off x="3794760" y="2697480"/>
-            <a:ext cx="640080" cy="365760"/>
+            <a:off x="1828800" y="3794760"/>
+            <a:ext cx="5394960" cy="438912"/>
           </a:xfrm>
           <a:prstGeom prst="rect">
             <a:avLst/>
@@ -3410,27 +3445,27 @@
           <a:p>
             <a:pPr algn="ctr"/>
             <a:r>
-              <a:rPr sz="1400" b="1">
-                <a:solidFill>
-                  <a:srgbClr val="969696"/>
-                </a:solidFill>
-                <a:latin typeface="Aptos"/>
+              <a:rPr sz="2400" b="1">
+                <a:solidFill>
+                  <a:srgbClr val="F5F7F8"/>
+                </a:solidFill>
+                <a:latin typeface="Arial"/>
               </a:rPr>
-              <a:t>vs</a:t>
-            </a:r>
-          </a:p>
-        </p:txBody>
-      </p:sp>
-      <p:sp>
-        <p:nvSpPr>
-          <p:cNvPr id="11" name="TextBox 10"/>
+              <a:t>EQUIPA_CASA</a:t>
+            </a:r>
+          </a:p>
+        </p:txBody>
+      </p:sp>
+      <p:sp>
+        <p:nvSpPr>
+          <p:cNvPr id="12" name="TextBox 11"/>
           <p:cNvSpPr txBox="1"/>
           <p:nvPr/>
         </p:nvSpPr>
         <p:spPr>
           <a:xfrm>
-            <a:off x="4480560" y="2596896"/>
-            <a:ext cx="3063240" cy="685800"/>
+            <a:off x="4251960" y="4343400"/>
+            <a:ext cx="640080" cy="320040"/>
           </a:xfrm>
           <a:prstGeom prst="rect">
             <a:avLst/>
@@ -3445,37 +3480,107 @@
           <a:p>
             <a:pPr algn="ctr"/>
             <a:r>
-              <a:rPr sz="2000" b="1">
-                <a:solidFill>
-                  <a:srgbClr val="F5F5F5"/>
-                </a:solidFill>
-                <a:latin typeface="Aptos"/>
+              <a:rPr sz="2200" b="1">
+                <a:solidFill>
+                  <a:srgbClr val="E7B63D"/>
+                </a:solidFill>
+                <a:latin typeface="Arial"/>
               </a:rPr>
-              <a:t>{{EQUIPA_FORA}}</a:t>
-            </a:r>
-          </a:p>
-        </p:txBody>
-      </p:sp>
-      <p:sp>
-        <p:nvSpPr>
-          <p:cNvPr id="12" name="Rounded Rectangle 11"/>
+              <a:t>VS</a:t>
+            </a:r>
+          </a:p>
+        </p:txBody>
+      </p:sp>
+      <p:sp>
+        <p:nvSpPr>
+          <p:cNvPr id="13" name="TextBox 12"/>
+          <p:cNvSpPr txBox="1"/>
+          <p:nvPr/>
+        </p:nvSpPr>
+        <p:spPr>
+          <a:xfrm>
+            <a:off x="1828800" y="4617720"/>
+            <a:ext cx="5394960" cy="438912"/>
+          </a:xfrm>
+          <a:prstGeom prst="rect">
+            <a:avLst/>
+          </a:prstGeom>
+          <a:noFill/>
+        </p:spPr>
+        <p:txBody>
+          <a:bodyPr wrap="none" anchor="ctr">
+            <a:spAutoFit/>
+          </a:bodyPr>
+          <a:lstStyle/>
+          <a:p>
+            <a:pPr algn="ctr"/>
+            <a:r>
+              <a:rPr sz="2400" b="1">
+                <a:solidFill>
+                  <a:srgbClr val="F5F7F8"/>
+                </a:solidFill>
+                <a:latin typeface="Arial"/>
+              </a:rPr>
+              <a:t>EQUIPA_FORA</a:t>
+            </a:r>
+          </a:p>
+        </p:txBody>
+      </p:sp>
+      <p:sp>
+        <p:nvSpPr>
+          <p:cNvPr id="14" name="TextBox 13"/>
+          <p:cNvSpPr txBox="1"/>
+          <p:nvPr/>
+        </p:nvSpPr>
+        <p:spPr>
+          <a:xfrm>
+            <a:off x="7269480" y="3767328"/>
+            <a:ext cx="1325880" cy="1234440"/>
+          </a:xfrm>
+          <a:prstGeom prst="rect">
+            <a:avLst/>
+          </a:prstGeom>
+          <a:noFill/>
+        </p:spPr>
+        <p:txBody>
+          <a:bodyPr wrap="none" anchor="ctr">
+            <a:spAutoFit/>
+          </a:bodyPr>
+          <a:lstStyle/>
+          <a:p>
+            <a:pPr algn="ctr"/>
+            <a:r>
+              <a:rPr sz="1400" b="1">
+                <a:solidFill>
+                  <a:srgbClr val="E7B63D"/>
+                </a:solidFill>
+                <a:latin typeface="Arial"/>
+              </a:rPr>
+              <a:t>ESCUDO_FORA</a:t>
+            </a:r>
+          </a:p>
+        </p:txBody>
+      </p:sp>
+      <p:sp>
+        <p:nvSpPr>
+          <p:cNvPr id="15" name="Rounded Rectangle 14"/>
           <p:cNvSpPr/>
           <p:nvPr/>
         </p:nvSpPr>
         <p:spPr>
           <a:xfrm>
-            <a:off x="1252728" y="4069080"/>
-            <a:ext cx="2148840" cy="1965960"/>
+            <a:off x="347472" y="5897880"/>
+            <a:ext cx="8449056" cy="1737360"/>
           </a:xfrm>
           <a:prstGeom prst="roundRect">
             <a:avLst/>
           </a:prstGeom>
           <a:solidFill>
-            <a:srgbClr val="232323"/>
+            <a:srgbClr val="141F25"/>
           </a:solidFill>
           <a:ln>
             <a:solidFill>
-              <a:srgbClr val="5A5A5A"/>
+              <a:srgbClr val="465258"/>
             </a:solidFill>
           </a:ln>
         </p:spPr>
@@ -3503,14 +3608,14 @@
       </p:sp>
       <p:sp>
         <p:nvSpPr>
-          <p:cNvPr id="13" name="TextBox 12"/>
+          <p:cNvPr id="16" name="TextBox 15"/>
           <p:cNvSpPr txBox="1"/>
           <p:nvPr/>
         </p:nvSpPr>
         <p:spPr>
           <a:xfrm>
-            <a:off x="1252728" y="4823460"/>
-            <a:ext cx="2148840" cy="457200"/>
+            <a:off x="640080" y="6153912"/>
+            <a:ext cx="2011680" cy="1225295"/>
           </a:xfrm>
           <a:prstGeom prst="rect">
             <a:avLst/>
@@ -3525,27 +3630,27 @@
           <a:p>
             <a:pPr algn="ctr"/>
             <a:r>
-              <a:rPr sz="1400" b="1">
-                <a:solidFill>
-                  <a:srgbClr val="AAAAAA"/>
-                </a:solidFill>
-                <a:latin typeface="Aptos"/>
+              <a:rPr sz="1300" b="1">
+                <a:solidFill>
+                  <a:srgbClr val="E7B63D"/>
+                </a:solidFill>
+                <a:latin typeface="Arial"/>
               </a:rPr>
-              <a:t>{{FOTO_1}}</a:t>
-            </a:r>
-          </a:p>
-        </p:txBody>
-      </p:sp>
-      <p:sp>
-        <p:nvSpPr>
-          <p:cNvPr id="14" name="TextBox 13"/>
+              <a:t>FOTO_1</a:t>
+            </a:r>
+          </a:p>
+        </p:txBody>
+      </p:sp>
+      <p:sp>
+        <p:nvSpPr>
+          <p:cNvPr id="17" name="TextBox 16"/>
           <p:cNvSpPr txBox="1"/>
           <p:nvPr/>
         </p:nvSpPr>
         <p:spPr>
           <a:xfrm>
-            <a:off x="594360" y="6153912"/>
-            <a:ext cx="3429000" cy="384048"/>
+            <a:off x="2834640" y="6309360"/>
+            <a:ext cx="5120640" cy="320040"/>
           </a:xfrm>
           <a:prstGeom prst="rect">
             <a:avLst/>
@@ -3558,29 +3663,29 @@
           </a:bodyPr>
           <a:lstStyle/>
           <a:p>
-            <a:pPr algn="ctr"/>
-            <a:r>
-              <a:rPr sz="1500" b="1">
-                <a:solidFill>
-                  <a:srgbClr val="F5F5F5"/>
-                </a:solidFill>
-                <a:latin typeface="Aptos"/>
+            <a:pPr algn="l"/>
+            <a:r>
+              <a:rPr sz="1800" b="1">
+                <a:solidFill>
+                  <a:srgbClr val="E7B63D"/>
+                </a:solidFill>
+                <a:latin typeface="Arial"/>
               </a:rPr>
-              <a:t>{{NOME_1}}</a:t>
-            </a:r>
-          </a:p>
-        </p:txBody>
-      </p:sp>
-      <p:sp>
-        <p:nvSpPr>
-          <p:cNvPr id="15" name="TextBox 14"/>
+              <a:t>FUNCAO_1</a:t>
+            </a:r>
+          </a:p>
+        </p:txBody>
+      </p:sp>
+      <p:sp>
+        <p:nvSpPr>
+          <p:cNvPr id="18" name="TextBox 17"/>
           <p:cNvSpPr txBox="1"/>
           <p:nvPr/>
         </p:nvSpPr>
         <p:spPr>
           <a:xfrm>
-            <a:off x="594360" y="6556248"/>
-            <a:ext cx="3429000" cy="310896"/>
+            <a:off x="2834640" y="6830568"/>
+            <a:ext cx="5212080" cy="594360"/>
           </a:xfrm>
           <a:prstGeom prst="rect">
             <a:avLst/>
@@ -3593,39 +3698,39 @@
           </a:bodyPr>
           <a:lstStyle/>
           <a:p>
-            <a:pPr algn="ctr"/>
-            <a:r>
-              <a:rPr sz="1000" b="0">
-                <a:solidFill>
-                  <a:srgbClr val="AAAAAA"/>
-                </a:solidFill>
-                <a:latin typeface="Aptos"/>
+            <a:pPr algn="l"/>
+            <a:r>
+              <a:rPr sz="2800" b="1">
+                <a:solidFill>
+                  <a:srgbClr val="F5F7F8"/>
+                </a:solidFill>
+                <a:latin typeface="Arial"/>
               </a:rPr>
-              <a:t>Árbitro</a:t>
-            </a:r>
-          </a:p>
-        </p:txBody>
-      </p:sp>
-      <p:sp>
-        <p:nvSpPr>
-          <p:cNvPr id="16" name="Rounded Rectangle 15"/>
+              <a:t>NOME_1</a:t>
+            </a:r>
+          </a:p>
+        </p:txBody>
+      </p:sp>
+      <p:sp>
+        <p:nvSpPr>
+          <p:cNvPr id="19" name="Rounded Rectangle 18"/>
           <p:cNvSpPr/>
           <p:nvPr/>
         </p:nvSpPr>
         <p:spPr>
           <a:xfrm>
-            <a:off x="4773168" y="4069080"/>
-            <a:ext cx="2148840" cy="1965960"/>
+            <a:off x="347472" y="7799832"/>
+            <a:ext cx="8449056" cy="1737360"/>
           </a:xfrm>
           <a:prstGeom prst="roundRect">
             <a:avLst/>
           </a:prstGeom>
           <a:solidFill>
-            <a:srgbClr val="232323"/>
+            <a:srgbClr val="141F25"/>
           </a:solidFill>
           <a:ln>
             <a:solidFill>
-              <a:srgbClr val="5A5A5A"/>
+              <a:srgbClr val="465258"/>
             </a:solidFill>
           </a:ln>
         </p:spPr>
@@ -3653,14 +3758,14 @@
       </p:sp>
       <p:sp>
         <p:nvSpPr>
-          <p:cNvPr id="17" name="TextBox 16"/>
+          <p:cNvPr id="20" name="TextBox 19"/>
           <p:cNvSpPr txBox="1"/>
           <p:nvPr/>
         </p:nvSpPr>
         <p:spPr>
           <a:xfrm>
-            <a:off x="4773168" y="4823460"/>
-            <a:ext cx="2148840" cy="457200"/>
+            <a:off x="640080" y="8055864"/>
+            <a:ext cx="2011680" cy="1225295"/>
           </a:xfrm>
           <a:prstGeom prst="rect">
             <a:avLst/>
@@ -3675,27 +3780,27 @@
           <a:p>
             <a:pPr algn="ctr"/>
             <a:r>
-              <a:rPr sz="1400" b="1">
-                <a:solidFill>
-                  <a:srgbClr val="AAAAAA"/>
-                </a:solidFill>
-                <a:latin typeface="Aptos"/>
+              <a:rPr sz="1300" b="1">
+                <a:solidFill>
+                  <a:srgbClr val="E7B63D"/>
+                </a:solidFill>
+                <a:latin typeface="Arial"/>
               </a:rPr>
-              <a:t>{{FOTO_2}}</a:t>
-            </a:r>
-          </a:p>
-        </p:txBody>
-      </p:sp>
-      <p:sp>
-        <p:nvSpPr>
-          <p:cNvPr id="18" name="TextBox 17"/>
+              <a:t>FOTO_2</a:t>
+            </a:r>
+          </a:p>
+        </p:txBody>
+      </p:sp>
+      <p:sp>
+        <p:nvSpPr>
+          <p:cNvPr id="21" name="TextBox 20"/>
           <p:cNvSpPr txBox="1"/>
           <p:nvPr/>
         </p:nvSpPr>
         <p:spPr>
           <a:xfrm>
-            <a:off x="4114800" y="6153912"/>
-            <a:ext cx="3429000" cy="384048"/>
+            <a:off x="2834640" y="8211312"/>
+            <a:ext cx="5120640" cy="320040"/>
           </a:xfrm>
           <a:prstGeom prst="rect">
             <a:avLst/>
@@ -3708,29 +3813,29 @@
           </a:bodyPr>
           <a:lstStyle/>
           <a:p>
-            <a:pPr algn="ctr"/>
-            <a:r>
-              <a:rPr sz="1500" b="1">
-                <a:solidFill>
-                  <a:srgbClr val="F5F5F5"/>
-                </a:solidFill>
-                <a:latin typeface="Aptos"/>
+            <a:pPr algn="l"/>
+            <a:r>
+              <a:rPr sz="1800" b="1">
+                <a:solidFill>
+                  <a:srgbClr val="E7B63D"/>
+                </a:solidFill>
+                <a:latin typeface="Arial"/>
               </a:rPr>
-              <a:t>{{NOME_2}}</a:t>
-            </a:r>
-          </a:p>
-        </p:txBody>
-      </p:sp>
-      <p:sp>
-        <p:nvSpPr>
-          <p:cNvPr id="19" name="TextBox 18"/>
+              <a:t>FUNCAO_2</a:t>
+            </a:r>
+          </a:p>
+        </p:txBody>
+      </p:sp>
+      <p:sp>
+        <p:nvSpPr>
+          <p:cNvPr id="22" name="TextBox 21"/>
           <p:cNvSpPr txBox="1"/>
           <p:nvPr/>
         </p:nvSpPr>
         <p:spPr>
           <a:xfrm>
-            <a:off x="4114800" y="6556248"/>
-            <a:ext cx="3429000" cy="310896"/>
+            <a:off x="2834640" y="8732520"/>
+            <a:ext cx="5212080" cy="594360"/>
           </a:xfrm>
           <a:prstGeom prst="rect">
             <a:avLst/>
@@ -3743,39 +3848,39 @@
           </a:bodyPr>
           <a:lstStyle/>
           <a:p>
-            <a:pPr algn="ctr"/>
-            <a:r>
-              <a:rPr sz="1000" b="0">
-                <a:solidFill>
-                  <a:srgbClr val="AAAAAA"/>
-                </a:solidFill>
-                <a:latin typeface="Aptos"/>
+            <a:pPr algn="l"/>
+            <a:r>
+              <a:rPr sz="2800" b="1">
+                <a:solidFill>
+                  <a:srgbClr val="F5F7F8"/>
+                </a:solidFill>
+                <a:latin typeface="Arial"/>
               </a:rPr>
-              <a:t>Árbitro Assistente 1</a:t>
-            </a:r>
-          </a:p>
-        </p:txBody>
-      </p:sp>
-      <p:sp>
-        <p:nvSpPr>
-          <p:cNvPr id="20" name="Rounded Rectangle 19"/>
+              <a:t>NOME_2</a:t>
+            </a:r>
+          </a:p>
+        </p:txBody>
+      </p:sp>
+      <p:sp>
+        <p:nvSpPr>
+          <p:cNvPr id="23" name="Rounded Rectangle 22"/>
           <p:cNvSpPr/>
           <p:nvPr/>
         </p:nvSpPr>
         <p:spPr>
           <a:xfrm>
-            <a:off x="1252728" y="7223760"/>
-            <a:ext cx="2148840" cy="1965960"/>
+            <a:off x="347472" y="9701784"/>
+            <a:ext cx="8449056" cy="1737360"/>
           </a:xfrm>
           <a:prstGeom prst="roundRect">
             <a:avLst/>
           </a:prstGeom>
           <a:solidFill>
-            <a:srgbClr val="232323"/>
+            <a:srgbClr val="141F25"/>
           </a:solidFill>
           <a:ln>
             <a:solidFill>
-              <a:srgbClr val="5A5A5A"/>
+              <a:srgbClr val="465258"/>
             </a:solidFill>
           </a:ln>
         </p:spPr>
@@ -3803,14 +3908,14 @@
       </p:sp>
       <p:sp>
         <p:nvSpPr>
-          <p:cNvPr id="21" name="TextBox 20"/>
+          <p:cNvPr id="24" name="TextBox 23"/>
           <p:cNvSpPr txBox="1"/>
           <p:nvPr/>
         </p:nvSpPr>
         <p:spPr>
           <a:xfrm>
-            <a:off x="1252728" y="7978140"/>
-            <a:ext cx="2148840" cy="457200"/>
+            <a:off x="640080" y="9957816"/>
+            <a:ext cx="2011680" cy="1225295"/>
           </a:xfrm>
           <a:prstGeom prst="rect">
             <a:avLst/>
@@ -3825,27 +3930,27 @@
           <a:p>
             <a:pPr algn="ctr"/>
             <a:r>
-              <a:rPr sz="1400" b="1">
-                <a:solidFill>
-                  <a:srgbClr val="AAAAAA"/>
-                </a:solidFill>
-                <a:latin typeface="Aptos"/>
+              <a:rPr sz="1300" b="1">
+                <a:solidFill>
+                  <a:srgbClr val="E7B63D"/>
+                </a:solidFill>
+                <a:latin typeface="Arial"/>
               </a:rPr>
-              <a:t>{{FOTO_3}}</a:t>
-            </a:r>
-          </a:p>
-        </p:txBody>
-      </p:sp>
-      <p:sp>
-        <p:nvSpPr>
-          <p:cNvPr id="22" name="TextBox 21"/>
+              <a:t>FOTO_3</a:t>
+            </a:r>
+          </a:p>
+        </p:txBody>
+      </p:sp>
+      <p:sp>
+        <p:nvSpPr>
+          <p:cNvPr id="25" name="TextBox 24"/>
           <p:cNvSpPr txBox="1"/>
           <p:nvPr/>
         </p:nvSpPr>
         <p:spPr>
           <a:xfrm>
-            <a:off x="594360" y="9308592"/>
-            <a:ext cx="3429000" cy="384048"/>
+            <a:off x="2834640" y="10113264"/>
+            <a:ext cx="5120640" cy="320040"/>
           </a:xfrm>
           <a:prstGeom prst="rect">
             <a:avLst/>
@@ -3858,29 +3963,29 @@
           </a:bodyPr>
           <a:lstStyle/>
           <a:p>
-            <a:pPr algn="ctr"/>
-            <a:r>
-              <a:rPr sz="1500" b="1">
-                <a:solidFill>
-                  <a:srgbClr val="F5F5F5"/>
-                </a:solidFill>
-                <a:latin typeface="Aptos"/>
+            <a:pPr algn="l"/>
+            <a:r>
+              <a:rPr sz="1800" b="1">
+                <a:solidFill>
+                  <a:srgbClr val="E7B63D"/>
+                </a:solidFill>
+                <a:latin typeface="Arial"/>
               </a:rPr>
-              <a:t>{{NOME_3}}</a:t>
-            </a:r>
-          </a:p>
-        </p:txBody>
-      </p:sp>
-      <p:sp>
-        <p:nvSpPr>
-          <p:cNvPr id="23" name="TextBox 22"/>
+              <a:t>FUNCAO_3</a:t>
+            </a:r>
+          </a:p>
+        </p:txBody>
+      </p:sp>
+      <p:sp>
+        <p:nvSpPr>
+          <p:cNvPr id="26" name="TextBox 25"/>
           <p:cNvSpPr txBox="1"/>
           <p:nvPr/>
         </p:nvSpPr>
         <p:spPr>
           <a:xfrm>
-            <a:off x="594360" y="9710928"/>
-            <a:ext cx="3429000" cy="310896"/>
+            <a:off x="2834640" y="10634472"/>
+            <a:ext cx="5212080" cy="594360"/>
           </a:xfrm>
           <a:prstGeom prst="rect">
             <a:avLst/>
@@ -3893,39 +3998,39 @@
           </a:bodyPr>
           <a:lstStyle/>
           <a:p>
-            <a:pPr algn="ctr"/>
-            <a:r>
-              <a:rPr sz="1000" b="0">
-                <a:solidFill>
-                  <a:srgbClr val="AAAAAA"/>
-                </a:solidFill>
-                <a:latin typeface="Aptos"/>
+            <a:pPr algn="l"/>
+            <a:r>
+              <a:rPr sz="2800" b="1">
+                <a:solidFill>
+                  <a:srgbClr val="F5F7F8"/>
+                </a:solidFill>
+                <a:latin typeface="Arial"/>
               </a:rPr>
-              <a:t>Árbitro Assistente 2</a:t>
-            </a:r>
-          </a:p>
-        </p:txBody>
-      </p:sp>
-      <p:sp>
-        <p:nvSpPr>
-          <p:cNvPr id="24" name="Rounded Rectangle 23"/>
+              <a:t>NOME_3</a:t>
+            </a:r>
+          </a:p>
+        </p:txBody>
+      </p:sp>
+      <p:sp>
+        <p:nvSpPr>
+          <p:cNvPr id="27" name="Rounded Rectangle 26"/>
           <p:cNvSpPr/>
           <p:nvPr/>
         </p:nvSpPr>
         <p:spPr>
           <a:xfrm>
-            <a:off x="4773168" y="7223760"/>
-            <a:ext cx="2148840" cy="1965960"/>
+            <a:off x="347472" y="11603736"/>
+            <a:ext cx="8449056" cy="1737360"/>
           </a:xfrm>
           <a:prstGeom prst="roundRect">
             <a:avLst/>
           </a:prstGeom>
           <a:solidFill>
-            <a:srgbClr val="232323"/>
+            <a:srgbClr val="141F25"/>
           </a:solidFill>
           <a:ln>
             <a:solidFill>
-              <a:srgbClr val="5A5A5A"/>
+              <a:srgbClr val="465258"/>
             </a:solidFill>
           </a:ln>
         </p:spPr>
@@ -3953,14 +4058,14 @@
       </p:sp>
       <p:sp>
         <p:nvSpPr>
-          <p:cNvPr id="25" name="TextBox 24"/>
+          <p:cNvPr id="28" name="TextBox 27"/>
           <p:cNvSpPr txBox="1"/>
           <p:nvPr/>
         </p:nvSpPr>
         <p:spPr>
           <a:xfrm>
-            <a:off x="4773168" y="7978140"/>
-            <a:ext cx="2148840" cy="457200"/>
+            <a:off x="640080" y="11859768"/>
+            <a:ext cx="2011680" cy="1225295"/>
           </a:xfrm>
           <a:prstGeom prst="rect">
             <a:avLst/>
@@ -3975,27 +4080,27 @@
           <a:p>
             <a:pPr algn="ctr"/>
             <a:r>
-              <a:rPr sz="1400" b="1">
-                <a:solidFill>
-                  <a:srgbClr val="AAAAAA"/>
-                </a:solidFill>
-                <a:latin typeface="Aptos"/>
+              <a:rPr sz="1300" b="1">
+                <a:solidFill>
+                  <a:srgbClr val="E7B63D"/>
+                </a:solidFill>
+                <a:latin typeface="Arial"/>
               </a:rPr>
-              <a:t>{{FOTO_4}}</a:t>
-            </a:r>
-          </a:p>
-        </p:txBody>
-      </p:sp>
-      <p:sp>
-        <p:nvSpPr>
-          <p:cNvPr id="26" name="TextBox 25"/>
+              <a:t>FOTO_4</a:t>
+            </a:r>
+          </a:p>
+        </p:txBody>
+      </p:sp>
+      <p:sp>
+        <p:nvSpPr>
+          <p:cNvPr id="29" name="TextBox 28"/>
           <p:cNvSpPr txBox="1"/>
           <p:nvPr/>
         </p:nvSpPr>
         <p:spPr>
           <a:xfrm>
-            <a:off x="4114800" y="9308592"/>
-            <a:ext cx="3429000" cy="384048"/>
+            <a:off x="2834640" y="12015216"/>
+            <a:ext cx="5120640" cy="320040"/>
           </a:xfrm>
           <a:prstGeom prst="rect">
             <a:avLst/>
@@ -4008,29 +4113,29 @@
           </a:bodyPr>
           <a:lstStyle/>
           <a:p>
-            <a:pPr algn="ctr"/>
-            <a:r>
-              <a:rPr sz="1500" b="1">
-                <a:solidFill>
-                  <a:srgbClr val="F5F5F5"/>
-                </a:solidFill>
-                <a:latin typeface="Aptos"/>
+            <a:pPr algn="l"/>
+            <a:r>
+              <a:rPr sz="1800" b="1">
+                <a:solidFill>
+                  <a:srgbClr val="E7B63D"/>
+                </a:solidFill>
+                <a:latin typeface="Arial"/>
               </a:rPr>
-              <a:t>{{NOME_4}}</a:t>
-            </a:r>
-          </a:p>
-        </p:txBody>
-      </p:sp>
-      <p:sp>
-        <p:nvSpPr>
-          <p:cNvPr id="27" name="TextBox 26"/>
+              <a:t>FUNCAO_4</a:t>
+            </a:r>
+          </a:p>
+        </p:txBody>
+      </p:sp>
+      <p:sp>
+        <p:nvSpPr>
+          <p:cNvPr id="30" name="TextBox 29"/>
           <p:cNvSpPr txBox="1"/>
           <p:nvPr/>
         </p:nvSpPr>
         <p:spPr>
           <a:xfrm>
-            <a:off x="4114800" y="9710928"/>
-            <a:ext cx="3429000" cy="310896"/>
+            <a:off x="2834640" y="12536424"/>
+            <a:ext cx="5212080" cy="594360"/>
           </a:xfrm>
           <a:prstGeom prst="rect">
             <a:avLst/>
@@ -4043,29 +4148,29 @@
           </a:bodyPr>
           <a:lstStyle/>
           <a:p>
-            <a:pPr algn="ctr"/>
-            <a:r>
-              <a:rPr sz="1000" b="0">
-                <a:solidFill>
-                  <a:srgbClr val="AAAAAA"/>
-                </a:solidFill>
-                <a:latin typeface="Aptos"/>
+            <a:pPr algn="l"/>
+            <a:r>
+              <a:rPr sz="2800" b="1">
+                <a:solidFill>
+                  <a:srgbClr val="F5F7F8"/>
+                </a:solidFill>
+                <a:latin typeface="Arial"/>
               </a:rPr>
-              <a:t>4.º Árbitro</a:t>
-            </a:r>
-          </a:p>
-        </p:txBody>
-      </p:sp>
-      <p:sp>
-        <p:nvSpPr>
-          <p:cNvPr id="28" name="TextBox 27"/>
+              <a:t>NOME_4</a:t>
+            </a:r>
+          </a:p>
+        </p:txBody>
+      </p:sp>
+      <p:sp>
+        <p:nvSpPr>
+          <p:cNvPr id="31" name="TextBox 30"/>
           <p:cNvSpPr txBox="1"/>
           <p:nvPr/>
         </p:nvSpPr>
         <p:spPr>
           <a:xfrm>
-            <a:off x="502920" y="13213080"/>
-            <a:ext cx="7223760" cy="274320"/>
+            <a:off x="548640" y="15499080"/>
+            <a:ext cx="8046720" cy="320040"/>
           </a:xfrm>
           <a:prstGeom prst="rect">
             <a:avLst/>
@@ -4078,15 +4183,50 @@
           </a:bodyPr>
           <a:lstStyle/>
           <a:p>
-            <a:pPr algn="r"/>
-            <a:r>
-              <a:rPr sz="800" b="0">
-                <a:solidFill>
-                  <a:srgbClr val="5A5A5A"/>
-                </a:solidFill>
-                <a:latin typeface="Aptos"/>
+            <a:pPr algn="ctr"/>
+            <a:r>
+              <a:rPr sz="1500" b="1">
+                <a:solidFill>
+                  <a:srgbClr val="F5F7F8"/>
+                </a:solidFill>
+                <a:latin typeface="Arial"/>
               </a:rPr>
-              <a:t>{{TIPO_MODELO}}</a:t>
+              <a:t>TRABALHO, COMPETÊNCIA E DEDICAÇÃO</a:t>
+            </a:r>
+          </a:p>
+        </p:txBody>
+      </p:sp>
+      <p:sp>
+        <p:nvSpPr>
+          <p:cNvPr id="32" name="TextBox 31"/>
+          <p:cNvSpPr txBox="1"/>
+          <p:nvPr/>
+        </p:nvSpPr>
+        <p:spPr>
+          <a:xfrm>
+            <a:off x="2971800" y="15855696"/>
+            <a:ext cx="3200400" cy="228600"/>
+          </a:xfrm>
+          <a:prstGeom prst="rect">
+            <a:avLst/>
+          </a:prstGeom>
+          <a:noFill/>
+        </p:spPr>
+        <p:txBody>
+          <a:bodyPr wrap="none" anchor="ctr">
+            <a:spAutoFit/>
+          </a:bodyPr>
+          <a:lstStyle/>
+          <a:p>
+            <a:pPr algn="ctr"/>
+            <a:r>
+              <a:rPr sz="1100" b="1">
+                <a:solidFill>
+                  <a:srgbClr val="E7B63D"/>
+                </a:solidFill>
+                <a:latin typeface="Arial"/>
+              </a:rPr>
+              <a:t>/NAFMARQUES_BOM</a:t>
             </a:r>
           </a:p>
         </p:txBody>
